--- a/fixtures/enterprise-mixed/office/deck.pptx
+++ b/fixtures/enterprise-mixed/office/deck.pptx
@@ -1,8 +1,31 @@
 
 <file path=ppt/presentation.xml><?xml version="1.0" encoding="utf-8"?>
-<p:presentation xmlns:p="http://schemas.openxmlformats.org/presentationml/2006/main">
+<p:presentation xmlns:p="http://schemas.openxmlformats.org/presentationml/2006/main" xmlns:r="http://schemas.openxmlformats.org/officeDocument/2006/relationships">
   <p:sldIdLst>
-    <p:sldId xmlns:r="http://schemas.openxmlformats.org/officeDocument/2006/relationships" id="256" r:id="rId1"/>
+    <p:sldId id="256" r:id="rId1"/>
   </p:sldIdLst>
 </p:presentation>
+</file>
+
+<file path=ppt/slides/slide1.xml><?xml version="1.0" encoding="utf-8"?>
+<p:sld xmlns:p="http://schemas.openxmlformats.org/presentationml/2006/main" xmlns:a="http://schemas.openxmlformats.org/drawingml/2006/main">
+  <p:cSld>
+    <p:spTree>
+      <p:sp>
+        <p:nvSpPr>
+          <p:nvPr>
+            <p:ph type="title"/>
+          </p:nvPr>
+        </p:nvSpPr>
+        <p:txBody>
+          <a:p>
+            <a:r>
+              <a:t>Synthetic</a:t>
+            </a:r>
+          </a:p>
+        </p:txBody>
+      </p:sp>
+    </p:spTree>
+  </p:cSld>
+</p:sld>
 </file>